--- a/public/fun/pack/pptx/reviewpro/보장점검양식프리미엄_06_본인점검_민트플래티넘.pptx
+++ b/public/fun/pack/pptx/reviewpro/보장점검양식프리미엄_06_본인점검_민트플래티넘.pptx
@@ -112,12 +112,12 @@
   <p:extLst>
     <p:ext uri="{521415D9-36F7-43E2-AB2F-B90AF26B5E84}">
       <p14:sectionLst xmlns:p14="http://schemas.microsoft.com/office/powerpoint/2010/main">
-        <p14:section name="시작" id="{CAA47BED-473F-43DA-BA27-4EED687F953A}">
+        <p14:section name="시작" id="{B0872AFD-D807-4A81-A3B2-9AF32198CC6F}">
           <p14:sldIdLst>
             <p14:sldId id="256"/>
           </p14:sldIdLst>
         </p14:section>
-        <p14:section name="본문" id="{49134FD9-9756-4637-92C8-19772E27C8C0}">
+        <p14:section name="본문" id="{47A6FC0A-CC66-4A70-84A4-F21DC7821ACB}">
           <p14:sldIdLst>
             <p14:sldId id="257"/>
             <p14:sldId id="258"/>
@@ -1553,7 +1553,7 @@
             </a:lvl1pPr>
           </a:lstStyle>
           <a:p>
-            <a:fld id="{942E241F-0B09-4367-88F4-2D98E4A9AA16}" type="slidenum">
+            <a:fld id="{45BFE6B8-DBE1-447D-97F7-AE4B276D22B9}" type="slidenum">
               <a:rPr lang="en-US"/>
               <a:t>‹#›</a:t>
             </a:fld>
@@ -2225,7 +2225,7 @@
             </a:lvl1pPr>
           </a:lstStyle>
           <a:p>
-            <a:fld id="{AF2B1F4C-32D5-4C29-B537-DBB6E35C1C88}" type="slidenum">
+            <a:fld id="{C6137B54-062F-4FDB-A3F3-9CC72B93FF43}" type="slidenum">
               <a:rPr lang="en-US"/>
               <a:t>‹#›</a:t>
             </a:fld>
@@ -2895,7 +2895,7 @@
             </a:lvl1pPr>
           </a:lstStyle>
           <a:p>
-            <a:fld id="{69347584-73D4-42A3-BA5C-BFBE054DBC32}" type="slidenum">
+            <a:fld id="{DD41A9B7-83A5-4935-B85A-D18B57AB6BE3}" type="slidenum">
               <a:rPr lang="en-US"/>
               <a:t>‹#›</a:t>
             </a:fld>
@@ -3758,7 +3758,7 @@
           <a:p>
             <a:r>
               <a:rPr lang="ko-KR"/>
-              <a:t>본인 점검 · 0000. 00. 00</a:t>
+              <a:t>본인 점검 · 날짜 입력</a:t>
             </a:r>
           </a:p>
           <a:p>
@@ -3849,7 +3849,7 @@
           <a:bodyPr/>
           <a:lstStyle/>
           <a:p>
-            <a:fld id="{1F8F994A-B1ED-47A7-8A35-A2D57C147A13}" type="slidenum">
+            <a:fld id="{542248BC-9246-44BB-8CA4-372AF78E7152}" type="slidenum">
               <a:rPr lang="en-US"/>
               <a:t>‹#›</a:t>
             </a:fld>
@@ -4365,7 +4365,7 @@
           <a:bodyPr/>
           <a:lstStyle/>
           <a:p>
-            <a:fld id="{0D552DB4-E6D1-4C5B-B7CB-5295CBC1EDC6}" type="slidenum">
+            <a:fld id="{048004FB-7382-451D-8205-00CF9882C062}" type="slidenum">
               <a:rPr lang="en-US"/>
               <a:t>‹#›</a:t>
             </a:fld>
@@ -5871,7 +5871,7 @@
           <a:bodyPr/>
           <a:lstStyle/>
           <a:p>
-            <a:fld id="{728ED7A2-4F41-4AD0-A039-E4BA8DE23D3A}" type="slidenum">
+            <a:fld id="{3DD28902-537C-48CE-989E-A11F6A8937DA}" type="slidenum">
               <a:rPr lang="en-US"/>
               <a:t>‹#›</a:t>
             </a:fld>
@@ -7421,7 +7421,7 @@
           <a:bodyPr/>
           <a:lstStyle/>
           <a:p>
-            <a:fld id="{E1773D6E-BA91-47BB-99FF-76085E685D22}" type="slidenum">
+            <a:fld id="{3C840C8A-D025-4AC4-A4F4-585C015BBC15}" type="slidenum">
               <a:rPr lang="en-US"/>
               <a:t>‹#›</a:t>
             </a:fld>
@@ -8358,7 +8358,7 @@
           <a:bodyPr/>
           <a:lstStyle/>
           <a:p>
-            <a:fld id="{B03EF0C6-0F8D-4CE9-9A14-C4609BEC0FDF}" type="slidenum">
+            <a:fld id="{BC6B0DA4-BD3F-41F5-AD41-4694E0575E82}" type="slidenum">
               <a:rPr lang="en-US"/>
               <a:t>‹#›</a:t>
             </a:fld>
